--- a/docs/ahc_submission_2slide.pptx
+++ b/docs/ahc_submission_2slide.pptx
@@ -3571,7 +3571,7 @@
                 </a:solidFill>
                 <a:latin typeface="Verdana"/>
               </a:rPr>
-              <a:t>2.7x</a:t>
+              <a:t>2.8x</a:t>
             </a:r>
           </a:p>
         </p:txBody>
@@ -3650,7 +3650,7 @@
                 </a:solidFill>
                 <a:latin typeface="Verdana"/>
               </a:rPr>
-              <a:t>88%</a:t>
+              <a:t>87%</a:t>
             </a:r>
           </a:p>
         </p:txBody>
@@ -3729,7 +3729,7 @@
                 </a:solidFill>
                 <a:latin typeface="Verdana"/>
               </a:rPr>
-              <a:t>3,207</a:t>
+              <a:t>83%</a:t>
             </a:r>
           </a:p>
         </p:txBody>
@@ -3768,8 +3768,8 @@
                 </a:solidFill>
                 <a:latin typeface="Verdana"/>
               </a:rPr>
-              <a:t>clips indexed across
-8 split archives</a:t>
+              <a:t>of wall time is spent
+inside the VLM</a:t>
             </a:r>
           </a:p>
         </p:txBody>
@@ -4093,8 +4093,8 @@
         </p:nvSpPr>
         <p:spPr>
           <a:xfrm>
-            <a:off x="6263640" y="1188720"/>
-            <a:ext cx="5486400" cy="5120640"/>
+            <a:off x="6263640" y="1152144"/>
+            <a:ext cx="5486400" cy="2651760"/>
           </a:xfrm>
           <a:prstGeom prst="rect">
             <a:avLst/>
@@ -4119,55 +4119,71 @@
                 </a:solidFill>
                 <a:latin typeface="Verdana"/>
               </a:rPr>
-              <a:t>THE FINDING THAT MATTERED MOST</a:t>
+              <a:t>TWO FINDINGS THAT CHANGED THE DESIGN</a:t>
             </a:r>
           </a:p>
           <a:p>
             <a:pPr algn="l">
               <a:spcAft>
-                <a:spcPts val="1100"/>
+                <a:spcPts val="100"/>
               </a:spcAft>
             </a:pPr>
             <a:r>
-              <a:rPr sz="980" b="0">
-                <a:solidFill>
-                  <a:srgbClr val="5B6472"/>
+              <a:rPr sz="1019" b="1">
+                <a:solidFill>
+                  <a:srgbClr val="1A1D23"/>
                 </a:solidFill>
                 <a:latin typeface="Verdana"/>
               </a:rPr>
-              <a:t>Our predicted events had a median length of 1.5 s. Real events have a median of 20 s. We were reporting the width of a sampling window as the duration of an incident, so IoU &gt;= 0.5 was unreachable and 75 of the 100 marks were mathematically out of reach. Walking the health curve outward from each detection, to find where the scene returns to normal, moved IoU matches from 0 to 2.</a:t>
+              <a:t>We were measuring the sampler, not the event.</a:t>
             </a:r>
           </a:p>
           <a:p>
             <a:pPr algn="l">
               <a:spcAft>
-                <a:spcPts val="700"/>
+                <a:spcPts val="900"/>
               </a:spcAft>
             </a:pPr>
             <a:r>
-              <a:rPr sz="950" b="1">
-                <a:solidFill>
-                  <a:srgbClr val="D97706"/>
+              <a:rPr sz="950" b="0">
+                <a:solidFill>
+                  <a:srgbClr val="5B6472"/>
                 </a:solidFill>
                 <a:latin typeface="Verdana"/>
               </a:rPr>
-              <a:t>COVERAGE WAS A SILENT KILLER</a:t>
+              <a:t>Predicted events had a median length of 1.5 s; real ones last 20 s. We were reporting the width of a sampling window as the duration of an incident, so IoU &gt;= 0.5 was unreachable and 75 of the 100 marks were out of reach. Walking the health curve outward to find where the scene returns to normal moved matches from 0 to 2.</a:t>
             </a:r>
           </a:p>
           <a:p>
             <a:pPr algn="l">
               <a:spcAft>
-                <a:spcPts val="1100"/>
+                <a:spcPts val="100"/>
               </a:spcAft>
             </a:pPr>
             <a:r>
-              <a:rPr sz="980" b="0">
-                <a:solidFill>
-                  <a:srgbClr val="5B6472"/>
+              <a:rPr sz="1019" b="1">
+                <a:solidFill>
+                  <a:srgbClr val="1A1D23"/>
                 </a:solidFill>
                 <a:latin typeface="Verdana"/>
               </a:rPr>
-              <a:t>The health threshold was calibrated on 5-30 s clips, then applied to 240-629 s videos from different cameras. Nine of 34 videos got zero VLM looks; seven were genuinely anomalous, 41% of all our misses. A periodic scan floor plus a guaranteed last-resort look took that to zero.</a:t>
+              <a:t>Coverage was a silent killer.</a:t>
+            </a:r>
+          </a:p>
+          <a:p>
+            <a:pPr algn="l">
+              <a:spcAft>
+                <a:spcPts val="0"/>
+              </a:spcAft>
+            </a:pPr>
+            <a:r>
+              <a:rPr sz="950" b="0">
+                <a:solidFill>
+                  <a:srgbClr val="5B6472"/>
+                </a:solidFill>
+                <a:latin typeface="Verdana"/>
+              </a:rPr>
+              <a:t>The threshold was calibrated on 5-30 s clips, then applied to 240-629 s videos from other cameras. Nine of 34 videos got zero VLM looks; seven were genuinely anomalous, 41% of all misses. A scan floor plus a guaranteed last-resort look took that to zero.</a:t>
             </a:r>
           </a:p>
         </p:txBody>
@@ -4188,7 +4204,7 @@
         </p:blipFill>
         <p:spPr>
           <a:xfrm>
-            <a:off x="6263640" y="3913632"/>
+            <a:off x="6263640" y="3803904"/>
             <a:ext cx="5486400" cy="1496291"/>
           </a:xfrm>
           <a:prstGeom prst="rect">
@@ -4204,7 +4220,7 @@
         </p:nvSpPr>
         <p:spPr>
           <a:xfrm>
-            <a:off x="6263640" y="5138928"/>
+            <a:off x="6263640" y="5413248"/>
             <a:ext cx="5486400" cy="10972"/>
           </a:xfrm>
           <a:prstGeom prst="rect">
@@ -4248,8 +4264,8 @@
         </p:nvSpPr>
         <p:spPr>
           <a:xfrm>
-            <a:off x="6263640" y="5285232"/>
-            <a:ext cx="5486400" cy="1280160"/>
+            <a:off x="6263640" y="5541264"/>
+            <a:ext cx="5486400" cy="1188720"/>
           </a:xfrm>
           <a:prstGeom prst="rect">
             <a:avLst/>
@@ -4274,7 +4290,7 @@
                 </a:solidFill>
                 <a:latin typeface="Verdana"/>
               </a:rPr>
-              <a:t>WHAT IS STILL BROKEN, HONESTLY</a:t>
+              <a:t>THE REAL BOTTLENECK, AND WHAT WE WOULD DO NEXT</a:t>
             </a:r>
           </a:p>
           <a:p>
@@ -4284,13 +4300,13 @@
               </a:spcAft>
             </a:pPr>
             <a:r>
-              <a:rPr sz="950" b="0">
+              <a:rPr sz="919" b="0">
                 <a:solidFill>
                   <a:srgbClr val="5B6472"/>
                 </a:solidFill>
                 <a:latin typeface="Verdana"/>
               </a:rPr>
-              <a:t>Stage 2 is now the wall. On the blind set, six of the eight high-value L2/L3 videos returned normal on every window, one of them on all 35 looks, 26 of which stage 1 had flagged as its most abnormal frames. Every non-normal verdict came back at exactly 0.95 or 0.98, so our confidence thresholds have never once been exercised. The next move is prompting, not plumbing.</a:t>
+              <a:t>Six of the eight high-value videos returned normal on every window - one on all 35 looks, 26 of which stage 1 had flagged as its most abnormal. The cause is measurable: the median clip we hand the VLM is 2 s wide, judging classes defined by persistence over 20 s. Next: widen stage-2 windows to ~20 s (fewer, cheaper calls), then derive confidence from self-consistency, because every non-normal verdict came back at exactly 0.95 or 0.98 - our thresholds have never once been exercised.</a:t>
             </a:r>
           </a:p>
         </p:txBody>
